--- a/deep_learning/3_RNN_NLP/2_NLP_pipeline/1_NLP_pipeline.pptx
+++ b/deep_learning/3_RNN_NLP/2_NLP_pipeline/1_NLP_pipeline.pptx
@@ -5,23 +5,22 @@
     <p:sldMasterId id="2147483648" r:id="rId1"/>
   </p:sldMasterIdLst>
   <p:notesMasterIdLst>
-    <p:notesMasterId r:id="rId13"/>
+    <p:notesMasterId r:id="rId12"/>
   </p:notesMasterIdLst>
   <p:handoutMasterIdLst>
-    <p:handoutMasterId r:id="rId14"/>
+    <p:handoutMasterId r:id="rId13"/>
   </p:handoutMasterIdLst>
   <p:sldIdLst>
-    <p:sldId id="276" r:id="rId2"/>
-    <p:sldId id="257" r:id="rId3"/>
-    <p:sldId id="277" r:id="rId4"/>
-    <p:sldId id="278" r:id="rId5"/>
-    <p:sldId id="279" r:id="rId6"/>
-    <p:sldId id="280" r:id="rId7"/>
-    <p:sldId id="281" r:id="rId8"/>
-    <p:sldId id="282" r:id="rId9"/>
-    <p:sldId id="283" r:id="rId10"/>
-    <p:sldId id="284" r:id="rId11"/>
-    <p:sldId id="275" r:id="rId12"/>
+    <p:sldId id="257" r:id="rId2"/>
+    <p:sldId id="277" r:id="rId3"/>
+    <p:sldId id="278" r:id="rId4"/>
+    <p:sldId id="279" r:id="rId5"/>
+    <p:sldId id="280" r:id="rId6"/>
+    <p:sldId id="281" r:id="rId7"/>
+    <p:sldId id="282" r:id="rId8"/>
+    <p:sldId id="283" r:id="rId9"/>
+    <p:sldId id="284" r:id="rId10"/>
+    <p:sldId id="275" r:id="rId11"/>
   </p:sldIdLst>
   <p:sldSz cx="12192000" cy="6858000"/>
   <p:notesSz cx="6858000" cy="9144000"/>
@@ -225,7 +224,7 @@
           <a:p>
             <a:fld id="{7BAEECA8-D063-486F-AE31-5020270C1449}" type="datetimeFigureOut">
               <a:rPr lang="en-US" smtClean="0"/>
-              <a:t>4/5/2026</a:t>
+              <a:t>4/11/2026</a:t>
             </a:fld>
             <a:endParaRPr lang="en-US"/>
           </a:p>
@@ -402,7 +401,7 @@
           <a:p>
             <a:fld id="{CB233BD1-3BA8-448D-9D08-7846095EA517}" type="datetimeFigureOut">
               <a:rPr lang="en-US" smtClean="0"/>
-              <a:t>4/5/2026</a:t>
+              <a:t>4/11/2026</a:t>
             </a:fld>
             <a:endParaRPr lang="en-US"/>
           </a:p>
@@ -816,7 +815,7 @@
           <a:p>
             <a:fld id="{6383FAE1-13DE-4511-8C1B-C8AFB720664C}" type="datetimeFigureOut">
               <a:rPr lang="en-US" smtClean="0"/>
-              <a:t>4/5/2026</a:t>
+              <a:t>4/11/2026</a:t>
             </a:fld>
             <a:endParaRPr lang="en-US"/>
           </a:p>
@@ -1014,7 +1013,7 @@
           <a:p>
             <a:fld id="{6383FAE1-13DE-4511-8C1B-C8AFB720664C}" type="datetimeFigureOut">
               <a:rPr lang="en-US" smtClean="0"/>
-              <a:t>4/5/2026</a:t>
+              <a:t>4/11/2026</a:t>
             </a:fld>
             <a:endParaRPr lang="en-US"/>
           </a:p>
@@ -1222,7 +1221,7 @@
           <a:p>
             <a:fld id="{6383FAE1-13DE-4511-8C1B-C8AFB720664C}" type="datetimeFigureOut">
               <a:rPr lang="en-US" smtClean="0"/>
-              <a:t>4/5/2026</a:t>
+              <a:t>4/11/2026</a:t>
             </a:fld>
             <a:endParaRPr lang="en-US"/>
           </a:p>
@@ -1420,7 +1419,7 @@
           <a:p>
             <a:fld id="{6383FAE1-13DE-4511-8C1B-C8AFB720664C}" type="datetimeFigureOut">
               <a:rPr lang="en-US" smtClean="0"/>
-              <a:t>4/5/2026</a:t>
+              <a:t>4/11/2026</a:t>
             </a:fld>
             <a:endParaRPr lang="en-US"/>
           </a:p>
@@ -1695,7 +1694,7 @@
           <a:p>
             <a:fld id="{6383FAE1-13DE-4511-8C1B-C8AFB720664C}" type="datetimeFigureOut">
               <a:rPr lang="en-US" smtClean="0"/>
-              <a:t>4/5/2026</a:t>
+              <a:t>4/11/2026</a:t>
             </a:fld>
             <a:endParaRPr lang="en-US"/>
           </a:p>
@@ -1960,7 +1959,7 @@
           <a:p>
             <a:fld id="{6383FAE1-13DE-4511-8C1B-C8AFB720664C}" type="datetimeFigureOut">
               <a:rPr lang="en-US" smtClean="0"/>
-              <a:t>4/5/2026</a:t>
+              <a:t>4/11/2026</a:t>
             </a:fld>
             <a:endParaRPr lang="en-US"/>
           </a:p>
@@ -2372,7 +2371,7 @@
           <a:p>
             <a:fld id="{6383FAE1-13DE-4511-8C1B-C8AFB720664C}" type="datetimeFigureOut">
               <a:rPr lang="en-US" smtClean="0"/>
-              <a:t>4/5/2026</a:t>
+              <a:t>4/11/2026</a:t>
             </a:fld>
             <a:endParaRPr lang="en-US"/>
           </a:p>
@@ -2513,7 +2512,7 @@
           <a:p>
             <a:fld id="{6383FAE1-13DE-4511-8C1B-C8AFB720664C}" type="datetimeFigureOut">
               <a:rPr lang="en-US" smtClean="0"/>
-              <a:t>4/5/2026</a:t>
+              <a:t>4/11/2026</a:t>
             </a:fld>
             <a:endParaRPr lang="en-US"/>
           </a:p>
@@ -2626,7 +2625,7 @@
           <a:p>
             <a:fld id="{6383FAE1-13DE-4511-8C1B-C8AFB720664C}" type="datetimeFigureOut">
               <a:rPr lang="en-US" smtClean="0"/>
-              <a:t>4/5/2026</a:t>
+              <a:t>4/11/2026</a:t>
             </a:fld>
             <a:endParaRPr lang="en-US"/>
           </a:p>
@@ -2937,7 +2936,7 @@
           <a:p>
             <a:fld id="{6383FAE1-13DE-4511-8C1B-C8AFB720664C}" type="datetimeFigureOut">
               <a:rPr lang="en-US" smtClean="0"/>
-              <a:t>4/5/2026</a:t>
+              <a:t>4/11/2026</a:t>
             </a:fld>
             <a:endParaRPr lang="en-US"/>
           </a:p>
@@ -3228,7 +3227,7 @@
           <a:p>
             <a:fld id="{6383FAE1-13DE-4511-8C1B-C8AFB720664C}" type="datetimeFigureOut">
               <a:rPr lang="en-US" smtClean="0"/>
-              <a:t>4/5/2026</a:t>
+              <a:t>4/11/2026</a:t>
             </a:fld>
             <a:endParaRPr lang="en-US"/>
           </a:p>
@@ -3472,7 +3471,7 @@
           <a:p>
             <a:fld id="{6383FAE1-13DE-4511-8C1B-C8AFB720664C}" type="datetimeFigureOut">
               <a:rPr lang="en-US" smtClean="0"/>
-              <a:t>4/5/2026</a:t>
+              <a:t>4/11/2026</a:t>
             </a:fld>
             <a:endParaRPr lang="en-US"/>
           </a:p>
@@ -4033,45 +4032,131 @@
       </p:grpSpPr>
       <p:sp>
         <p:nvSpPr>
-          <p:cNvPr id="2" name="Title 1">
-            <a:extLst>
-              <a:ext uri="{FF2B5EF4-FFF2-40B4-BE49-F238E27FC236}">
-                <a16:creationId xmlns:a16="http://schemas.microsoft.com/office/drawing/2014/main" id="{7EE215DA-3608-60AF-BA74-5CE165D36DFE}"/>
-              </a:ext>
-            </a:extLst>
-          </p:cNvPr>
-          <p:cNvSpPr>
-            <a:spLocks noGrp="1"/>
-          </p:cNvSpPr>
-          <p:nvPr>
-            <p:ph type="ctrTitle"/>
-          </p:nvPr>
+          <p:cNvPr id="7" name="TextBox 6">
+            <a:extLst>
+              <a:ext uri="{FF2B5EF4-FFF2-40B4-BE49-F238E27FC236}">
+                <a16:creationId xmlns:a16="http://schemas.microsoft.com/office/drawing/2014/main" id="{81508872-44FE-C987-D1E3-A093E1C9B1C1}"/>
+              </a:ext>
+            </a:extLst>
+          </p:cNvPr>
+          <p:cNvSpPr txBox="1"/>
+          <p:nvPr/>
         </p:nvSpPr>
         <p:spPr>
           <a:xfrm>
-            <a:off x="255639" y="666589"/>
-            <a:ext cx="11700387" cy="4041648"/>
+            <a:off x="383458" y="36855"/>
+            <a:ext cx="11348294" cy="2677656"/>
           </a:xfrm>
+          <a:prstGeom prst="rect">
+            <a:avLst/>
+          </a:prstGeom>
+          <a:noFill/>
         </p:spPr>
         <p:txBody>
-          <a:bodyPr>
-            <a:normAutofit/>
+          <a:bodyPr wrap="square">
+            <a:spAutoFit/>
           </a:bodyPr>
           <a:lstStyle/>
           <a:p>
-            <a:pPr algn="ctr"/>
-            <a:r>
-              <a:rPr lang="en-US" b="1" dirty="0"/>
-              <a:t>XXX</a:t>
-            </a:r>
-            <a:endParaRPr lang="en-US" dirty="0"/>
+            <a:r>
+              <a:rPr lang="en-US" sz="2400" b="1" dirty="0">
+                <a:solidFill>
+                  <a:schemeClr val="accent6">
+                    <a:lumMod val="60000"/>
+                    <a:lumOff val="40000"/>
+                  </a:schemeClr>
+                </a:solidFill>
+              </a:rPr>
+              <a:t>. 1. What is NLP Pipeline?</a:t>
+            </a:r>
+          </a:p>
+          <a:p>
+            <a:endParaRPr lang="en-US" sz="2400" b="1" dirty="0">
+              <a:solidFill>
+                <a:schemeClr val="accent6">
+                  <a:lumMod val="60000"/>
+                  <a:lumOff val="40000"/>
+                </a:schemeClr>
+              </a:solidFill>
+            </a:endParaRPr>
+          </a:p>
+          <a:p>
+            <a:r>
+              <a:rPr lang="en-US" sz="2400" dirty="0">
+                <a:solidFill>
+                  <a:schemeClr val="accent6">
+                    <a:lumMod val="60000"/>
+                    <a:lumOff val="40000"/>
+                  </a:schemeClr>
+                </a:solidFill>
+              </a:rPr>
+              <a:t>An </a:t>
+            </a:r>
+            <a:r>
+              <a:rPr lang="en-US" sz="2400" b="1" dirty="0">
+                <a:solidFill>
+                  <a:schemeClr val="accent6">
+                    <a:lumMod val="60000"/>
+                    <a:lumOff val="40000"/>
+                  </a:schemeClr>
+                </a:solidFill>
+              </a:rPr>
+              <a:t>NLP pipeline</a:t>
+            </a:r>
+            <a:r>
+              <a:rPr lang="en-US" sz="2400" dirty="0">
+                <a:solidFill>
+                  <a:schemeClr val="accent6">
+                    <a:lumMod val="60000"/>
+                    <a:lumOff val="40000"/>
+                  </a:schemeClr>
+                </a:solidFill>
+              </a:rPr>
+              <a:t> is a sequence of steps to convert raw text into a format a model can understand.</a:t>
+            </a:r>
+          </a:p>
+          <a:p>
+            <a:endParaRPr lang="en-US" sz="2400" b="1" dirty="0">
+              <a:solidFill>
+                <a:schemeClr val="accent6">
+                  <a:lumMod val="60000"/>
+                  <a:lumOff val="40000"/>
+                </a:schemeClr>
+              </a:solidFill>
+            </a:endParaRPr>
+          </a:p>
+          <a:p>
+            <a:r>
+              <a:rPr lang="en-US" sz="2400" b="1" dirty="0">
+                <a:solidFill>
+                  <a:schemeClr val="accent6">
+                    <a:lumMod val="60000"/>
+                    <a:lumOff val="40000"/>
+                  </a:schemeClr>
+                </a:solidFill>
+              </a:rPr>
+              <a:t>Pipeline Flow:</a:t>
+            </a:r>
+          </a:p>
+          <a:p>
+            <a:r>
+              <a:rPr lang="en-US" sz="2400" dirty="0">
+                <a:solidFill>
+                  <a:schemeClr val="accent6">
+                    <a:lumMod val="60000"/>
+                    <a:lumOff val="40000"/>
+                  </a:schemeClr>
+                </a:solidFill>
+              </a:rPr>
+              <a:t>Raw Text → Tokenization → Integer Encoding → Padding → Embeddings → Model (RNN)</a:t>
+            </a:r>
           </a:p>
         </p:txBody>
       </p:sp>
     </p:spTree>
     <p:extLst>
       <p:ext uri="{BB962C8B-B14F-4D97-AF65-F5344CB8AC3E}">
-        <p14:creationId xmlns:p14="http://schemas.microsoft.com/office/powerpoint/2010/main" val="2173766949"/>
+        <p14:creationId xmlns:p14="http://schemas.microsoft.com/office/powerpoint/2010/main" val="4221193315"/>
       </p:ext>
     </p:extLst>
   </p:cSld>
@@ -4082,72 +4167,6 @@
 </file>
 
 <file path=ppt/slides/slide10.xml><?xml version="1.0" encoding="utf-8"?>
-<p:sld xmlns:a="http://schemas.openxmlformats.org/drawingml/2006/main" xmlns:r="http://schemas.openxmlformats.org/officeDocument/2006/relationships" xmlns:p="http://schemas.openxmlformats.org/presentationml/2006/main">
-  <p:cSld>
-    <p:spTree>
-      <p:nvGrpSpPr>
-        <p:cNvPr id="1" name="">
-          <a:extLst>
-            <a:ext uri="{FF2B5EF4-FFF2-40B4-BE49-F238E27FC236}">
-              <a16:creationId xmlns:a16="http://schemas.microsoft.com/office/drawing/2014/main" id="{C566A600-2A51-B354-1B0A-FE08D2EAD891}"/>
-            </a:ext>
-          </a:extLst>
-        </p:cNvPr>
-        <p:cNvGrpSpPr/>
-        <p:nvPr/>
-      </p:nvGrpSpPr>
-      <p:grpSpPr>
-        <a:xfrm>
-          <a:off x="0" y="0"/>
-          <a:ext cx="0" cy="0"/>
-          <a:chOff x="0" y="0"/>
-          <a:chExt cx="0" cy="0"/>
-        </a:xfrm>
-      </p:grpSpPr>
-      <p:pic>
-        <p:nvPicPr>
-          <p:cNvPr id="4" name="Picture 3">
-            <a:extLst>
-              <a:ext uri="{FF2B5EF4-FFF2-40B4-BE49-F238E27FC236}">
-                <a16:creationId xmlns:a16="http://schemas.microsoft.com/office/drawing/2014/main" id="{21176DBC-9FE6-E2DC-F99F-D450DE56E068}"/>
-              </a:ext>
-            </a:extLst>
-          </p:cNvPr>
-          <p:cNvPicPr>
-            <a:picLocks noChangeAspect="1"/>
-          </p:cNvPicPr>
-          <p:nvPr/>
-        </p:nvPicPr>
-        <p:blipFill>
-          <a:blip r:embed="rId2"/>
-          <a:stretch>
-            <a:fillRect/>
-          </a:stretch>
-        </p:blipFill>
-        <p:spPr>
-          <a:xfrm>
-            <a:off x="1677817" y="521208"/>
-            <a:ext cx="6730326" cy="2654213"/>
-          </a:xfrm>
-          <a:prstGeom prst="rect">
-            <a:avLst/>
-          </a:prstGeom>
-        </p:spPr>
-      </p:pic>
-    </p:spTree>
-    <p:extLst>
-      <p:ext uri="{BB962C8B-B14F-4D97-AF65-F5344CB8AC3E}">
-        <p14:creationId xmlns:p14="http://schemas.microsoft.com/office/powerpoint/2010/main" val="862666623"/>
-      </p:ext>
-    </p:extLst>
-  </p:cSld>
-  <p:clrMapOvr>
-    <a:masterClrMapping/>
-  </p:clrMapOvr>
-</p:sld>
-</file>
-
-<file path=ppt/slides/slide11.xml><?xml version="1.0" encoding="utf-8"?>
 <p:sld xmlns:a="http://schemas.openxmlformats.org/drawingml/2006/main" xmlns:r="http://schemas.openxmlformats.org/officeDocument/2006/relationships" xmlns:p="http://schemas.openxmlformats.org/presentationml/2006/main">
   <p:cSld>
     <p:spTree>
@@ -4300,159 +4319,6 @@
   <p:cSld>
     <p:spTree>
       <p:nvGrpSpPr>
-        <p:cNvPr id="1" name=""/>
-        <p:cNvGrpSpPr/>
-        <p:nvPr/>
-      </p:nvGrpSpPr>
-      <p:grpSpPr>
-        <a:xfrm>
-          <a:off x="0" y="0"/>
-          <a:ext cx="0" cy="0"/>
-          <a:chOff x="0" y="0"/>
-          <a:chExt cx="0" cy="0"/>
-        </a:xfrm>
-      </p:grpSpPr>
-      <p:sp>
-        <p:nvSpPr>
-          <p:cNvPr id="7" name="TextBox 6">
-            <a:extLst>
-              <a:ext uri="{FF2B5EF4-FFF2-40B4-BE49-F238E27FC236}">
-                <a16:creationId xmlns:a16="http://schemas.microsoft.com/office/drawing/2014/main" id="{81508872-44FE-C987-D1E3-A093E1C9B1C1}"/>
-              </a:ext>
-            </a:extLst>
-          </p:cNvPr>
-          <p:cNvSpPr txBox="1"/>
-          <p:nvPr/>
-        </p:nvSpPr>
-        <p:spPr>
-          <a:xfrm>
-            <a:off x="383458" y="36855"/>
-            <a:ext cx="11348294" cy="2677656"/>
-          </a:xfrm>
-          <a:prstGeom prst="rect">
-            <a:avLst/>
-          </a:prstGeom>
-          <a:noFill/>
-        </p:spPr>
-        <p:txBody>
-          <a:bodyPr wrap="square">
-            <a:spAutoFit/>
-          </a:bodyPr>
-          <a:lstStyle/>
-          <a:p>
-            <a:r>
-              <a:rPr lang="en-US" sz="2400" b="1" dirty="0">
-                <a:solidFill>
-                  <a:schemeClr val="accent6">
-                    <a:lumMod val="60000"/>
-                    <a:lumOff val="40000"/>
-                  </a:schemeClr>
-                </a:solidFill>
-              </a:rPr>
-              <a:t>. 1. What is NLP Pipeline?</a:t>
-            </a:r>
-          </a:p>
-          <a:p>
-            <a:endParaRPr lang="en-US" sz="2400" b="1" dirty="0">
-              <a:solidFill>
-                <a:schemeClr val="accent6">
-                  <a:lumMod val="60000"/>
-                  <a:lumOff val="40000"/>
-                </a:schemeClr>
-              </a:solidFill>
-            </a:endParaRPr>
-          </a:p>
-          <a:p>
-            <a:r>
-              <a:rPr lang="en-US" sz="2400" dirty="0">
-                <a:solidFill>
-                  <a:schemeClr val="accent6">
-                    <a:lumMod val="60000"/>
-                    <a:lumOff val="40000"/>
-                  </a:schemeClr>
-                </a:solidFill>
-              </a:rPr>
-              <a:t>An </a:t>
-            </a:r>
-            <a:r>
-              <a:rPr lang="en-US" sz="2400" b="1" dirty="0">
-                <a:solidFill>
-                  <a:schemeClr val="accent6">
-                    <a:lumMod val="60000"/>
-                    <a:lumOff val="40000"/>
-                  </a:schemeClr>
-                </a:solidFill>
-              </a:rPr>
-              <a:t>NLP pipeline</a:t>
-            </a:r>
-            <a:r>
-              <a:rPr lang="en-US" sz="2400" dirty="0">
-                <a:solidFill>
-                  <a:schemeClr val="accent6">
-                    <a:lumMod val="60000"/>
-                    <a:lumOff val="40000"/>
-                  </a:schemeClr>
-                </a:solidFill>
-              </a:rPr>
-              <a:t> is a sequence of steps to convert raw text into a format a model can understand.</a:t>
-            </a:r>
-          </a:p>
-          <a:p>
-            <a:endParaRPr lang="en-US" sz="2400" b="1" dirty="0">
-              <a:solidFill>
-                <a:schemeClr val="accent6">
-                  <a:lumMod val="60000"/>
-                  <a:lumOff val="40000"/>
-                </a:schemeClr>
-              </a:solidFill>
-            </a:endParaRPr>
-          </a:p>
-          <a:p>
-            <a:r>
-              <a:rPr lang="en-US" sz="2400" b="1" dirty="0">
-                <a:solidFill>
-                  <a:schemeClr val="accent6">
-                    <a:lumMod val="60000"/>
-                    <a:lumOff val="40000"/>
-                  </a:schemeClr>
-                </a:solidFill>
-              </a:rPr>
-              <a:t>Pipeline Flow:</a:t>
-            </a:r>
-          </a:p>
-          <a:p>
-            <a:r>
-              <a:rPr lang="en-US" sz="2400" dirty="0">
-                <a:solidFill>
-                  <a:schemeClr val="accent6">
-                    <a:lumMod val="60000"/>
-                    <a:lumOff val="40000"/>
-                  </a:schemeClr>
-                </a:solidFill>
-              </a:rPr>
-              <a:t>Raw Text → Tokenization → Integer Encoding → Padding → Embeddings → Model (RNN)</a:t>
-            </a:r>
-          </a:p>
-        </p:txBody>
-      </p:sp>
-    </p:spTree>
-    <p:extLst>
-      <p:ext uri="{BB962C8B-B14F-4D97-AF65-F5344CB8AC3E}">
-        <p14:creationId xmlns:p14="http://schemas.microsoft.com/office/powerpoint/2010/main" val="4221193315"/>
-      </p:ext>
-    </p:extLst>
-  </p:cSld>
-  <p:clrMapOvr>
-    <a:masterClrMapping/>
-  </p:clrMapOvr>
-</p:sld>
-</file>
-
-<file path=ppt/slides/slide3.xml><?xml version="1.0" encoding="utf-8"?>
-<p:sld xmlns:a="http://schemas.openxmlformats.org/drawingml/2006/main" xmlns:r="http://schemas.openxmlformats.org/officeDocument/2006/relationships" xmlns:p="http://schemas.openxmlformats.org/presentationml/2006/main">
-  <p:cSld>
-    <p:spTree>
-      <p:nvGrpSpPr>
         <p:cNvPr id="1" name="">
           <a:extLst>
             <a:ext uri="{FF2B5EF4-FFF2-40B4-BE49-F238E27FC236}">
@@ -4620,7 +4486,7 @@
 </p:sld>
 </file>
 
-<file path=ppt/slides/slide4.xml><?xml version="1.0" encoding="utf-8"?>
+<file path=ppt/slides/slide3.xml><?xml version="1.0" encoding="utf-8"?>
 <p:sld xmlns:a="http://schemas.openxmlformats.org/drawingml/2006/main" xmlns:r="http://schemas.openxmlformats.org/officeDocument/2006/relationships" xmlns:p="http://schemas.openxmlformats.org/presentationml/2006/main">
   <p:cSld>
     <p:spTree>
@@ -4746,7 +4612,7 @@
 </p:sld>
 </file>
 
-<file path=ppt/slides/slide5.xml><?xml version="1.0" encoding="utf-8"?>
+<file path=ppt/slides/slide4.xml><?xml version="1.0" encoding="utf-8"?>
 <p:sld xmlns:a="http://schemas.openxmlformats.org/drawingml/2006/main" xmlns:r="http://schemas.openxmlformats.org/officeDocument/2006/relationships" xmlns:p="http://schemas.openxmlformats.org/presentationml/2006/main">
   <p:cSld>
     <p:spTree>
@@ -4902,7 +4768,7 @@
 </p:sld>
 </file>
 
-<file path=ppt/slides/slide6.xml><?xml version="1.0" encoding="utf-8"?>
+<file path=ppt/slides/slide5.xml><?xml version="1.0" encoding="utf-8"?>
 <p:sld xmlns:a="http://schemas.openxmlformats.org/drawingml/2006/main" xmlns:r="http://schemas.openxmlformats.org/officeDocument/2006/relationships" xmlns:p="http://schemas.openxmlformats.org/presentationml/2006/main">
   <p:cSld>
     <p:spTree>
@@ -4968,7 +4834,7 @@
 </p:sld>
 </file>
 
-<file path=ppt/slides/slide7.xml><?xml version="1.0" encoding="utf-8"?>
+<file path=ppt/slides/slide6.xml><?xml version="1.0" encoding="utf-8"?>
 <p:sld xmlns:a="http://schemas.openxmlformats.org/drawingml/2006/main" xmlns:r="http://schemas.openxmlformats.org/officeDocument/2006/relationships" xmlns:p="http://schemas.openxmlformats.org/presentationml/2006/main">
   <p:cSld>
     <p:spTree>
@@ -5139,7 +5005,7 @@
 </p:sld>
 </file>
 
-<file path=ppt/slides/slide8.xml><?xml version="1.0" encoding="utf-8"?>
+<file path=ppt/slides/slide7.xml><?xml version="1.0" encoding="utf-8"?>
 <p:sld xmlns:a="http://schemas.openxmlformats.org/drawingml/2006/main" xmlns:r="http://schemas.openxmlformats.org/officeDocument/2006/relationships" xmlns:p="http://schemas.openxmlformats.org/presentationml/2006/main">
   <p:cSld>
     <p:spTree>
@@ -5290,7 +5156,7 @@
 </p:sld>
 </file>
 
-<file path=ppt/slides/slide9.xml><?xml version="1.0" encoding="utf-8"?>
+<file path=ppt/slides/slide8.xml><?xml version="1.0" encoding="utf-8"?>
 <p:sld xmlns:a="http://schemas.openxmlformats.org/drawingml/2006/main" xmlns:r="http://schemas.openxmlformats.org/officeDocument/2006/relationships" xmlns:p="http://schemas.openxmlformats.org/presentationml/2006/main">
   <p:cSld>
     <p:spTree>
@@ -5527,6 +5393,72 @@
     <p:extLst>
       <p:ext uri="{BB962C8B-B14F-4D97-AF65-F5344CB8AC3E}">
         <p14:creationId xmlns:p14="http://schemas.microsoft.com/office/powerpoint/2010/main" val="4283922424"/>
+      </p:ext>
+    </p:extLst>
+  </p:cSld>
+  <p:clrMapOvr>
+    <a:masterClrMapping/>
+  </p:clrMapOvr>
+</p:sld>
+</file>
+
+<file path=ppt/slides/slide9.xml><?xml version="1.0" encoding="utf-8"?>
+<p:sld xmlns:a="http://schemas.openxmlformats.org/drawingml/2006/main" xmlns:r="http://schemas.openxmlformats.org/officeDocument/2006/relationships" xmlns:p="http://schemas.openxmlformats.org/presentationml/2006/main">
+  <p:cSld>
+    <p:spTree>
+      <p:nvGrpSpPr>
+        <p:cNvPr id="1" name="">
+          <a:extLst>
+            <a:ext uri="{FF2B5EF4-FFF2-40B4-BE49-F238E27FC236}">
+              <a16:creationId xmlns:a16="http://schemas.microsoft.com/office/drawing/2014/main" id="{C566A600-2A51-B354-1B0A-FE08D2EAD891}"/>
+            </a:ext>
+          </a:extLst>
+        </p:cNvPr>
+        <p:cNvGrpSpPr/>
+        <p:nvPr/>
+      </p:nvGrpSpPr>
+      <p:grpSpPr>
+        <a:xfrm>
+          <a:off x="0" y="0"/>
+          <a:ext cx="0" cy="0"/>
+          <a:chOff x="0" y="0"/>
+          <a:chExt cx="0" cy="0"/>
+        </a:xfrm>
+      </p:grpSpPr>
+      <p:pic>
+        <p:nvPicPr>
+          <p:cNvPr id="4" name="Picture 3">
+            <a:extLst>
+              <a:ext uri="{FF2B5EF4-FFF2-40B4-BE49-F238E27FC236}">
+                <a16:creationId xmlns:a16="http://schemas.microsoft.com/office/drawing/2014/main" id="{21176DBC-9FE6-E2DC-F99F-D450DE56E068}"/>
+              </a:ext>
+            </a:extLst>
+          </p:cNvPr>
+          <p:cNvPicPr>
+            <a:picLocks noChangeAspect="1"/>
+          </p:cNvPicPr>
+          <p:nvPr/>
+        </p:nvPicPr>
+        <p:blipFill>
+          <a:blip r:embed="rId2"/>
+          <a:stretch>
+            <a:fillRect/>
+          </a:stretch>
+        </p:blipFill>
+        <p:spPr>
+          <a:xfrm>
+            <a:off x="1677817" y="521208"/>
+            <a:ext cx="6730326" cy="2654213"/>
+          </a:xfrm>
+          <a:prstGeom prst="rect">
+            <a:avLst/>
+          </a:prstGeom>
+        </p:spPr>
+      </p:pic>
+    </p:spTree>
+    <p:extLst>
+      <p:ext uri="{BB962C8B-B14F-4D97-AF65-F5344CB8AC3E}">
+        <p14:creationId xmlns:p14="http://schemas.microsoft.com/office/powerpoint/2010/main" val="862666623"/>
       </p:ext>
     </p:extLst>
   </p:cSld>
